--- a/Programa Ballista- R&D Seminary.pptx
+++ b/Programa Ballista- R&D Seminary.pptx
@@ -200,7 +200,7 @@
           <a:p>
             <a:fld id="{B723E7E9-0B4C-4599-8387-854B68DD1F3F}" type="datetimeFigureOut">
               <a:rPr lang="es-MX" smtClean="0"/>
-              <a:t>16/12/2025</a:t>
+              <a:t>17/12/2025</a:t>
             </a:fld>
             <a:endParaRPr lang="es-MX"/>
           </a:p>
@@ -901,7 +901,7 @@
           <a:p>
             <a:fld id="{ABDDA2F0-ADA3-4A09-A4A4-0854B4A15306}" type="datetimeFigureOut">
               <a:rPr lang="es-MX" smtClean="0"/>
-              <a:t>16/12/2025</a:t>
+              <a:t>17/12/2025</a:t>
             </a:fld>
             <a:endParaRPr lang="es-MX"/>
           </a:p>
@@ -1071,7 +1071,7 @@
           <a:p>
             <a:fld id="{ABDDA2F0-ADA3-4A09-A4A4-0854B4A15306}" type="datetimeFigureOut">
               <a:rPr lang="es-MX" smtClean="0"/>
-              <a:t>16/12/2025</a:t>
+              <a:t>17/12/2025</a:t>
             </a:fld>
             <a:endParaRPr lang="es-MX"/>
           </a:p>
@@ -1251,7 +1251,7 @@
           <a:p>
             <a:fld id="{ABDDA2F0-ADA3-4A09-A4A4-0854B4A15306}" type="datetimeFigureOut">
               <a:rPr lang="es-MX" smtClean="0"/>
-              <a:t>16/12/2025</a:t>
+              <a:t>17/12/2025</a:t>
             </a:fld>
             <a:endParaRPr lang="es-MX"/>
           </a:p>
@@ -1421,7 +1421,7 @@
           <a:p>
             <a:fld id="{ABDDA2F0-ADA3-4A09-A4A4-0854B4A15306}" type="datetimeFigureOut">
               <a:rPr lang="es-MX" smtClean="0"/>
-              <a:t>16/12/2025</a:t>
+              <a:t>17/12/2025</a:t>
             </a:fld>
             <a:endParaRPr lang="es-MX"/>
           </a:p>
@@ -1667,7 +1667,7 @@
           <a:p>
             <a:fld id="{ABDDA2F0-ADA3-4A09-A4A4-0854B4A15306}" type="datetimeFigureOut">
               <a:rPr lang="es-MX" smtClean="0"/>
-              <a:t>16/12/2025</a:t>
+              <a:t>17/12/2025</a:t>
             </a:fld>
             <a:endParaRPr lang="es-MX"/>
           </a:p>
@@ -1899,7 +1899,7 @@
           <a:p>
             <a:fld id="{ABDDA2F0-ADA3-4A09-A4A4-0854B4A15306}" type="datetimeFigureOut">
               <a:rPr lang="es-MX" smtClean="0"/>
-              <a:t>16/12/2025</a:t>
+              <a:t>17/12/2025</a:t>
             </a:fld>
             <a:endParaRPr lang="es-MX"/>
           </a:p>
@@ -2266,7 +2266,7 @@
           <a:p>
             <a:fld id="{ABDDA2F0-ADA3-4A09-A4A4-0854B4A15306}" type="datetimeFigureOut">
               <a:rPr lang="es-MX" smtClean="0"/>
-              <a:t>16/12/2025</a:t>
+              <a:t>17/12/2025</a:t>
             </a:fld>
             <a:endParaRPr lang="es-MX"/>
           </a:p>
@@ -2384,7 +2384,7 @@
           <a:p>
             <a:fld id="{ABDDA2F0-ADA3-4A09-A4A4-0854B4A15306}" type="datetimeFigureOut">
               <a:rPr lang="es-MX" smtClean="0"/>
-              <a:t>16/12/2025</a:t>
+              <a:t>17/12/2025</a:t>
             </a:fld>
             <a:endParaRPr lang="es-MX"/>
           </a:p>
@@ -2479,7 +2479,7 @@
           <a:p>
             <a:fld id="{ABDDA2F0-ADA3-4A09-A4A4-0854B4A15306}" type="datetimeFigureOut">
               <a:rPr lang="es-MX" smtClean="0"/>
-              <a:t>16/12/2025</a:t>
+              <a:t>17/12/2025</a:t>
             </a:fld>
             <a:endParaRPr lang="es-MX"/>
           </a:p>
@@ -2756,7 +2756,7 @@
           <a:p>
             <a:fld id="{ABDDA2F0-ADA3-4A09-A4A4-0854B4A15306}" type="datetimeFigureOut">
               <a:rPr lang="es-MX" smtClean="0"/>
-              <a:t>16/12/2025</a:t>
+              <a:t>17/12/2025</a:t>
             </a:fld>
             <a:endParaRPr lang="es-MX"/>
           </a:p>
@@ -3013,7 +3013,7 @@
           <a:p>
             <a:fld id="{ABDDA2F0-ADA3-4A09-A4A4-0854B4A15306}" type="datetimeFigureOut">
               <a:rPr lang="es-MX" smtClean="0"/>
-              <a:t>16/12/2025</a:t>
+              <a:t>17/12/2025</a:t>
             </a:fld>
             <a:endParaRPr lang="es-MX"/>
           </a:p>
@@ -3226,7 +3226,7 @@
           <a:p>
             <a:fld id="{ABDDA2F0-ADA3-4A09-A4A4-0854B4A15306}" type="datetimeFigureOut">
               <a:rPr lang="es-MX" smtClean="0"/>
-              <a:t>16/12/2025</a:t>
+              <a:t>17/12/2025</a:t>
             </a:fld>
             <a:endParaRPr lang="es-MX"/>
           </a:p>
@@ -3636,7 +3636,7 @@
           <p:cNvPr id="12" name="Subtítulo 2">
             <a:extLst>
               <a:ext uri="{FF2B5EF4-FFF2-40B4-BE49-F238E27FC236}">
-                <a16:creationId xmlns:a16="http://schemas.microsoft.com/office/drawing/2014/main" id="{ECC718EC-22DC-2FC1-E7BF-660F4465FB20}"/>
+                <a16:creationId xmlns:a16="http://schemas.microsoft.com/office/drawing/2014/main" xmlns="" id="{ECC718EC-22DC-2FC1-E7BF-660F4465FB20}"/>
               </a:ext>
             </a:extLst>
           </p:cNvPr>
@@ -3853,7 +3853,7 @@
             <p:cNvPr id="1028" name="Picture 4" descr="Uanl vector logo - Uanl logo vector free download">
               <a:extLst>
                 <a:ext uri="{FF2B5EF4-FFF2-40B4-BE49-F238E27FC236}">
-                  <a16:creationId xmlns:a16="http://schemas.microsoft.com/office/drawing/2014/main" id="{A1EF89F4-4576-B62D-20F9-D2FF8A2E246A}"/>
+                  <a16:creationId xmlns:a16="http://schemas.microsoft.com/office/drawing/2014/main" xmlns="" id="{A1EF89F4-4576-B62D-20F9-D2FF8A2E246A}"/>
                 </a:ext>
               </a:extLst>
             </p:cNvPr>
@@ -3914,7 +3914,7 @@
               <p:cNvPr id="14" name="Grupo 13">
                 <a:extLst>
                   <a:ext uri="{FF2B5EF4-FFF2-40B4-BE49-F238E27FC236}">
-                    <a16:creationId xmlns:a16="http://schemas.microsoft.com/office/drawing/2014/main" id="{7618CDC3-6984-FA21-1D90-EF5639665330}"/>
+                    <a16:creationId xmlns:a16="http://schemas.microsoft.com/office/drawing/2014/main" xmlns="" id="{7618CDC3-6984-FA21-1D90-EF5639665330}"/>
                   </a:ext>
                 </a:extLst>
               </p:cNvPr>
@@ -3934,7 +3934,7 @@
                 <p:cNvPr id="1034" name="Picture 10" descr="Universidad Autónoma de Nuevo León">
                   <a:extLst>
                     <a:ext uri="{FF2B5EF4-FFF2-40B4-BE49-F238E27FC236}">
-                      <a16:creationId xmlns:a16="http://schemas.microsoft.com/office/drawing/2014/main" id="{614962FF-F8BC-8C60-D531-371C411ED902}"/>
+                      <a16:creationId xmlns:a16="http://schemas.microsoft.com/office/drawing/2014/main" xmlns="" id="{614962FF-F8BC-8C60-D531-371C411ED902}"/>
                     </a:ext>
                   </a:extLst>
                 </p:cNvPr>
@@ -3981,7 +3981,7 @@
                 <p:cNvPr id="1036" name="Picture 12" descr="Fisico Matematico Logo Símbolos Coloridos De La Matemáticas 3d Stock">
                   <a:extLst>
                     <a:ext uri="{FF2B5EF4-FFF2-40B4-BE49-F238E27FC236}">
-                      <a16:creationId xmlns:a16="http://schemas.microsoft.com/office/drawing/2014/main" id="{9DCF93C1-4712-9517-4CC0-A6074B26C461}"/>
+                      <a16:creationId xmlns:a16="http://schemas.microsoft.com/office/drawing/2014/main" xmlns="" id="{9DCF93C1-4712-9517-4CC0-A6074B26C461}"/>
                     </a:ext>
                   </a:extLst>
                 </p:cNvPr>
@@ -4126,7 +4126,7 @@
           <p:cNvPr id="2" name="Título 1">
             <a:extLst>
               <a:ext uri="{FF2B5EF4-FFF2-40B4-BE49-F238E27FC236}">
-                <a16:creationId xmlns:a16="http://schemas.microsoft.com/office/drawing/2014/main" id="{5EF8233C-F3DA-2ABC-9288-4BCD7433344C}"/>
+                <a16:creationId xmlns:a16="http://schemas.microsoft.com/office/drawing/2014/main" xmlns="" id="{5EF8233C-F3DA-2ABC-9288-4BCD7433344C}"/>
               </a:ext>
             </a:extLst>
           </p:cNvPr>
@@ -4139,7 +4139,7 @@
         </p:nvSpPr>
         <p:spPr>
           <a:xfrm>
-            <a:off x="1524000" y="1508761"/>
+            <a:off x="1524000" y="1640495"/>
             <a:ext cx="9144000" cy="2389822"/>
           </a:xfrm>
         </p:spPr>
@@ -4150,36 +4150,25 @@
           <a:lstStyle/>
           <a:p>
             <a:r>
-              <a:rPr lang="es-MX" sz="5400" dirty="0">
+              <a:rPr lang="es-MX" sz="8000" dirty="0">
                 <a:latin typeface="Times New Roman" panose="02020603050405020304" pitchFamily="18" charset="0"/>
                 <a:cs typeface="Times New Roman" panose="02020603050405020304" pitchFamily="18" charset="0"/>
               </a:rPr>
               <a:t>DYNX - HPRT</a:t>
             </a:r>
             <a:br>
-              <a:rPr lang="es-MX" sz="5400" dirty="0">
+              <a:rPr lang="es-MX" sz="8000" dirty="0">
                 <a:latin typeface="Times New Roman" panose="02020603050405020304" pitchFamily="18" charset="0"/>
                 <a:cs typeface="Times New Roman" panose="02020603050405020304" pitchFamily="18" charset="0"/>
               </a:rPr>
             </a:br>
             <a:r>
-              <a:rPr lang="es-MX" sz="5400" dirty="0">
+              <a:rPr lang="es-MX" sz="8000" dirty="0">
                 <a:latin typeface="Times New Roman" panose="02020603050405020304" pitchFamily="18" charset="0"/>
                 <a:cs typeface="Times New Roman" panose="02020603050405020304" pitchFamily="18" charset="0"/>
               </a:rPr>
-              <a:t>R&amp;D - </a:t>
-            </a:r>
-            <a:r>
-              <a:rPr lang="es-MX" sz="5400" dirty="0" err="1">
-                <a:latin typeface="Times New Roman" panose="02020603050405020304" pitchFamily="18" charset="0"/>
-                <a:cs typeface="Times New Roman" panose="02020603050405020304" pitchFamily="18" charset="0"/>
-              </a:rPr>
-              <a:t>Ballista</a:t>
-            </a:r>
-            <a:endParaRPr lang="es-MX" sz="5400" dirty="0">
-              <a:latin typeface="Times New Roman" panose="02020603050405020304" pitchFamily="18" charset="0"/>
-              <a:cs typeface="Times New Roman" panose="02020603050405020304" pitchFamily="18" charset="0"/>
-            </a:endParaRPr>
+              <a:t>R&amp;D - Ballista</a:t>
+            </a:r>
           </a:p>
         </p:txBody>
       </p:sp>
@@ -4188,7 +4177,7 @@
           <p:cNvPr id="3" name="Subtítulo 2">
             <a:extLst>
               <a:ext uri="{FF2B5EF4-FFF2-40B4-BE49-F238E27FC236}">
-                <a16:creationId xmlns:a16="http://schemas.microsoft.com/office/drawing/2014/main" id="{EC6C3CBE-087A-6EFC-794A-BF6D55DB7543}"/>
+                <a16:creationId xmlns:a16="http://schemas.microsoft.com/office/drawing/2014/main" xmlns="" id="{EC6C3CBE-087A-6EFC-794A-BF6D55DB7543}"/>
               </a:ext>
             </a:extLst>
           </p:cNvPr>
@@ -4201,34 +4190,47 @@
         </p:nvSpPr>
         <p:spPr>
           <a:xfrm>
-            <a:off x="1524000" y="3990658"/>
+            <a:off x="1524000" y="4218941"/>
             <a:ext cx="9144000" cy="1655762"/>
           </a:xfrm>
         </p:spPr>
         <p:txBody>
-          <a:bodyPr>
-            <a:normAutofit/>
+          <a:bodyPr vert="horz" lIns="91440" tIns="45720" rIns="91440" bIns="45720" rtlCol="0" anchor="b">
+            <a:noAutofit/>
           </a:bodyPr>
           <a:lstStyle/>
           <a:p>
-            <a:r>
-              <a:rPr lang="es-MX" sz="3400" dirty="0">
+            <a:pPr>
+              <a:spcBef>
+                <a:spcPct val="0"/>
+              </a:spcBef>
+            </a:pPr>
+            <a:r>
+              <a:rPr lang="es-MX" sz="4000" dirty="0">
                 <a:latin typeface="Times New Roman" panose="02020603050405020304" pitchFamily="18" charset="0"/>
+                <a:ea typeface="+mj-ea"/>
                 <a:cs typeface="Times New Roman" panose="02020603050405020304" pitchFamily="18" charset="0"/>
               </a:rPr>
               <a:t>Seminario técnico</a:t>
             </a:r>
           </a:p>
           <a:p>
-            <a:r>
-              <a:rPr lang="es-ES" sz="3400" dirty="0">
+            <a:pPr>
+              <a:spcBef>
+                <a:spcPct val="0"/>
+              </a:spcBef>
+            </a:pPr>
+            <a:r>
+              <a:rPr lang="es-ES" sz="4000" dirty="0">
                 <a:latin typeface="Times New Roman" panose="02020603050405020304" pitchFamily="18" charset="0"/>
+                <a:ea typeface="+mj-ea"/>
                 <a:cs typeface="Times New Roman" panose="02020603050405020304" pitchFamily="18" charset="0"/>
               </a:rPr>
               <a:t>Diseño y manufactura de vehículos lanzadores</a:t>
             </a:r>
-            <a:endParaRPr lang="es-MX" sz="3400" dirty="0">
+            <a:endParaRPr lang="es-MX" sz="4000" dirty="0">
               <a:latin typeface="Times New Roman" panose="02020603050405020304" pitchFamily="18" charset="0"/>
+              <a:ea typeface="+mj-ea"/>
               <a:cs typeface="Times New Roman" panose="02020603050405020304" pitchFamily="18" charset="0"/>
             </a:endParaRPr>
           </a:p>
@@ -4269,7 +4271,7 @@
           <p:cNvPr id="2" name="Título 1">
             <a:extLst>
               <a:ext uri="{FF2B5EF4-FFF2-40B4-BE49-F238E27FC236}">
-                <a16:creationId xmlns:a16="http://schemas.microsoft.com/office/drawing/2014/main" id="{7C97405F-E812-8ECA-0FBF-DE395633D086}"/>
+                <a16:creationId xmlns:a16="http://schemas.microsoft.com/office/drawing/2014/main" xmlns="" id="{7C97405F-E812-8ECA-0FBF-DE395633D086}"/>
               </a:ext>
             </a:extLst>
           </p:cNvPr>
@@ -4302,7 +4304,7 @@
           <p:cNvPr id="3" name="Marcador de contenido 2">
             <a:extLst>
               <a:ext uri="{FF2B5EF4-FFF2-40B4-BE49-F238E27FC236}">
-                <a16:creationId xmlns:a16="http://schemas.microsoft.com/office/drawing/2014/main" id="{4895F9A4-5583-A4D7-2C26-2C99E36AFD03}"/>
+                <a16:creationId xmlns:a16="http://schemas.microsoft.com/office/drawing/2014/main" xmlns="" id="{4895F9A4-5583-A4D7-2C26-2C99E36AFD03}"/>
               </a:ext>
             </a:extLst>
           </p:cNvPr>
@@ -4474,35 +4476,6 @@
           </a:p>
         </p:txBody>
       </p:sp>
-      <p:pic>
-        <p:nvPicPr>
-          <p:cNvPr id="11" name="Imagen 10">
-            <a:extLst>
-              <a:ext uri="{FF2B5EF4-FFF2-40B4-BE49-F238E27FC236}">
-                <a16:creationId xmlns:a16="http://schemas.microsoft.com/office/drawing/2014/main" id="{0D66D670-FACF-9D43-855E-DD4781E3E832}"/>
-              </a:ext>
-            </a:extLst>
-          </p:cNvPr>
-          <p:cNvPicPr>
-            <a:picLocks noChangeAspect="1"/>
-          </p:cNvPicPr>
-          <p:nvPr/>
-        </p:nvPicPr>
-        <p:blipFill>
-          <a:blip r:embed="rId3"/>
-          <a:srcRect l="15844" t="4523" r="73930"/>
-          <a:stretch/>
-        </p:blipFill>
-        <p:spPr>
-          <a:xfrm>
-            <a:off x="9673590" y="50879"/>
-            <a:ext cx="1200150" cy="6807121"/>
-          </a:xfrm>
-          <a:prstGeom prst="rect">
-            <a:avLst/>
-          </a:prstGeom>
-        </p:spPr>
-      </p:pic>
     </p:spTree>
     <p:extLst>
       <p:ext uri="{BB962C8B-B14F-4D97-AF65-F5344CB8AC3E}">
@@ -4546,7 +4519,7 @@
           <p:cNvPr id="13" name="Picture 12">
             <a:extLst>
               <a:ext uri="{FF2B5EF4-FFF2-40B4-BE49-F238E27FC236}">
-                <a16:creationId xmlns:a16="http://schemas.microsoft.com/office/drawing/2014/main" id="{130D5EE9-6E7E-80B8-FCFF-8881747CDF7D}"/>
+                <a16:creationId xmlns:a16="http://schemas.microsoft.com/office/drawing/2014/main" xmlns="" id="{130D5EE9-6E7E-80B8-FCFF-8881747CDF7D}"/>
               </a:ext>
             </a:extLst>
           </p:cNvPr>
@@ -4603,7 +4576,7 @@
           <p:cNvPr id="2" name="Título 1">
             <a:extLst>
               <a:ext uri="{FF2B5EF4-FFF2-40B4-BE49-F238E27FC236}">
-                <a16:creationId xmlns:a16="http://schemas.microsoft.com/office/drawing/2014/main" id="{670F0C23-FE50-8839-B107-C21CD5459C01}"/>
+                <a16:creationId xmlns:a16="http://schemas.microsoft.com/office/drawing/2014/main" xmlns="" id="{670F0C23-FE50-8839-B107-C21CD5459C01}"/>
               </a:ext>
             </a:extLst>
           </p:cNvPr>
@@ -4641,7 +4614,7 @@
           <p:cNvPr id="3" name="Marcador de contenido 2">
             <a:extLst>
               <a:ext uri="{FF2B5EF4-FFF2-40B4-BE49-F238E27FC236}">
-                <a16:creationId xmlns:a16="http://schemas.microsoft.com/office/drawing/2014/main" id="{3D773A57-4E75-6D1E-BD6A-ACA49DF5A864}"/>
+                <a16:creationId xmlns:a16="http://schemas.microsoft.com/office/drawing/2014/main" xmlns="" id="{3D773A57-4E75-6D1E-BD6A-ACA49DF5A864}"/>
               </a:ext>
             </a:extLst>
           </p:cNvPr>
@@ -4745,7 +4718,7 @@
             <p:cNvPr id="6" name="Picture 4" descr="Uanl vector logo - Uanl logo vector free download">
               <a:extLst>
                 <a:ext uri="{FF2B5EF4-FFF2-40B4-BE49-F238E27FC236}">
-                  <a16:creationId xmlns:a16="http://schemas.microsoft.com/office/drawing/2014/main" id="{A1EF89F4-4576-B62D-20F9-D2FF8A2E246A}"/>
+                  <a16:creationId xmlns:a16="http://schemas.microsoft.com/office/drawing/2014/main" xmlns="" id="{A1EF89F4-4576-B62D-20F9-D2FF8A2E246A}"/>
                 </a:ext>
               </a:extLst>
             </p:cNvPr>
@@ -4806,7 +4779,7 @@
               <p:cNvPr id="8" name="Grupo 13">
                 <a:extLst>
                   <a:ext uri="{FF2B5EF4-FFF2-40B4-BE49-F238E27FC236}">
-                    <a16:creationId xmlns:a16="http://schemas.microsoft.com/office/drawing/2014/main" id="{7618CDC3-6984-FA21-1D90-EF5639665330}"/>
+                    <a16:creationId xmlns:a16="http://schemas.microsoft.com/office/drawing/2014/main" xmlns="" id="{7618CDC3-6984-FA21-1D90-EF5639665330}"/>
                   </a:ext>
                 </a:extLst>
               </p:cNvPr>
@@ -4826,7 +4799,7 @@
                 <p:cNvPr id="10" name="Picture 10" descr="Universidad Autónoma de Nuevo León">
                   <a:extLst>
                     <a:ext uri="{FF2B5EF4-FFF2-40B4-BE49-F238E27FC236}">
-                      <a16:creationId xmlns:a16="http://schemas.microsoft.com/office/drawing/2014/main" id="{614962FF-F8BC-8C60-D531-371C411ED902}"/>
+                      <a16:creationId xmlns:a16="http://schemas.microsoft.com/office/drawing/2014/main" xmlns="" id="{614962FF-F8BC-8C60-D531-371C411ED902}"/>
                     </a:ext>
                   </a:extLst>
                 </p:cNvPr>
@@ -4873,7 +4846,7 @@
                 <p:cNvPr id="11" name="Picture 12" descr="Fisico Matematico Logo Símbolos Coloridos De La Matemáticas 3d Stock">
                   <a:extLst>
                     <a:ext uri="{FF2B5EF4-FFF2-40B4-BE49-F238E27FC236}">
-                      <a16:creationId xmlns:a16="http://schemas.microsoft.com/office/drawing/2014/main" id="{9DCF93C1-4712-9517-4CC0-A6074B26C461}"/>
+                      <a16:creationId xmlns:a16="http://schemas.microsoft.com/office/drawing/2014/main" xmlns="" id="{9DCF93C1-4712-9517-4CC0-A6074B26C461}"/>
                     </a:ext>
                   </a:extLst>
                 </p:cNvPr>
@@ -5053,7 +5026,7 @@
           <p:cNvPr id="2" name="Título 1">
             <a:extLst>
               <a:ext uri="{FF2B5EF4-FFF2-40B4-BE49-F238E27FC236}">
-                <a16:creationId xmlns:a16="http://schemas.microsoft.com/office/drawing/2014/main" id="{BAB3C702-D01F-22C8-A53B-ED6B01BB12EA}"/>
+                <a16:creationId xmlns:a16="http://schemas.microsoft.com/office/drawing/2014/main" xmlns="" id="{BAB3C702-D01F-22C8-A53B-ED6B01BB12EA}"/>
               </a:ext>
             </a:extLst>
           </p:cNvPr>
@@ -5086,7 +5059,7 @@
           <p:cNvPr id="3" name="Marcador de contenido 2">
             <a:extLst>
               <a:ext uri="{FF2B5EF4-FFF2-40B4-BE49-F238E27FC236}">
-                <a16:creationId xmlns:a16="http://schemas.microsoft.com/office/drawing/2014/main" id="{2D8CD9DD-E26B-97A0-50D8-9A66444B9BE2}"/>
+                <a16:creationId xmlns:a16="http://schemas.microsoft.com/office/drawing/2014/main" xmlns="" id="{2D8CD9DD-E26B-97A0-50D8-9A66444B9BE2}"/>
               </a:ext>
             </a:extLst>
           </p:cNvPr>

--- a/Programa Ballista- R&D Seminary.pptx
+++ b/Programa Ballista- R&D Seminary.pptx
@@ -200,7 +200,7 @@
           <a:p>
             <a:fld id="{B723E7E9-0B4C-4599-8387-854B68DD1F3F}" type="datetimeFigureOut">
               <a:rPr lang="es-MX" smtClean="0"/>
-              <a:t>17/12/2025</a:t>
+              <a:t>06/01/2026</a:t>
             </a:fld>
             <a:endParaRPr lang="es-MX"/>
           </a:p>
@@ -901,7 +901,7 @@
           <a:p>
             <a:fld id="{ABDDA2F0-ADA3-4A09-A4A4-0854B4A15306}" type="datetimeFigureOut">
               <a:rPr lang="es-MX" smtClean="0"/>
-              <a:t>17/12/2025</a:t>
+              <a:t>06/01/2026</a:t>
             </a:fld>
             <a:endParaRPr lang="es-MX"/>
           </a:p>
@@ -1071,7 +1071,7 @@
           <a:p>
             <a:fld id="{ABDDA2F0-ADA3-4A09-A4A4-0854B4A15306}" type="datetimeFigureOut">
               <a:rPr lang="es-MX" smtClean="0"/>
-              <a:t>17/12/2025</a:t>
+              <a:t>06/01/2026</a:t>
             </a:fld>
             <a:endParaRPr lang="es-MX"/>
           </a:p>
@@ -1251,7 +1251,7 @@
           <a:p>
             <a:fld id="{ABDDA2F0-ADA3-4A09-A4A4-0854B4A15306}" type="datetimeFigureOut">
               <a:rPr lang="es-MX" smtClean="0"/>
-              <a:t>17/12/2025</a:t>
+              <a:t>06/01/2026</a:t>
             </a:fld>
             <a:endParaRPr lang="es-MX"/>
           </a:p>
@@ -1421,7 +1421,7 @@
           <a:p>
             <a:fld id="{ABDDA2F0-ADA3-4A09-A4A4-0854B4A15306}" type="datetimeFigureOut">
               <a:rPr lang="es-MX" smtClean="0"/>
-              <a:t>17/12/2025</a:t>
+              <a:t>06/01/2026</a:t>
             </a:fld>
             <a:endParaRPr lang="es-MX"/>
           </a:p>
@@ -1667,7 +1667,7 @@
           <a:p>
             <a:fld id="{ABDDA2F0-ADA3-4A09-A4A4-0854B4A15306}" type="datetimeFigureOut">
               <a:rPr lang="es-MX" smtClean="0"/>
-              <a:t>17/12/2025</a:t>
+              <a:t>06/01/2026</a:t>
             </a:fld>
             <a:endParaRPr lang="es-MX"/>
           </a:p>
@@ -1899,7 +1899,7 @@
           <a:p>
             <a:fld id="{ABDDA2F0-ADA3-4A09-A4A4-0854B4A15306}" type="datetimeFigureOut">
               <a:rPr lang="es-MX" smtClean="0"/>
-              <a:t>17/12/2025</a:t>
+              <a:t>06/01/2026</a:t>
             </a:fld>
             <a:endParaRPr lang="es-MX"/>
           </a:p>
@@ -2266,7 +2266,7 @@
           <a:p>
             <a:fld id="{ABDDA2F0-ADA3-4A09-A4A4-0854B4A15306}" type="datetimeFigureOut">
               <a:rPr lang="es-MX" smtClean="0"/>
-              <a:t>17/12/2025</a:t>
+              <a:t>06/01/2026</a:t>
             </a:fld>
             <a:endParaRPr lang="es-MX"/>
           </a:p>
@@ -2384,7 +2384,7 @@
           <a:p>
             <a:fld id="{ABDDA2F0-ADA3-4A09-A4A4-0854B4A15306}" type="datetimeFigureOut">
               <a:rPr lang="es-MX" smtClean="0"/>
-              <a:t>17/12/2025</a:t>
+              <a:t>06/01/2026</a:t>
             </a:fld>
             <a:endParaRPr lang="es-MX"/>
           </a:p>
@@ -2479,7 +2479,7 @@
           <a:p>
             <a:fld id="{ABDDA2F0-ADA3-4A09-A4A4-0854B4A15306}" type="datetimeFigureOut">
               <a:rPr lang="es-MX" smtClean="0"/>
-              <a:t>17/12/2025</a:t>
+              <a:t>06/01/2026</a:t>
             </a:fld>
             <a:endParaRPr lang="es-MX"/>
           </a:p>
@@ -2756,7 +2756,7 @@
           <a:p>
             <a:fld id="{ABDDA2F0-ADA3-4A09-A4A4-0854B4A15306}" type="datetimeFigureOut">
               <a:rPr lang="es-MX" smtClean="0"/>
-              <a:t>17/12/2025</a:t>
+              <a:t>06/01/2026</a:t>
             </a:fld>
             <a:endParaRPr lang="es-MX"/>
           </a:p>
@@ -3013,7 +3013,7 @@
           <a:p>
             <a:fld id="{ABDDA2F0-ADA3-4A09-A4A4-0854B4A15306}" type="datetimeFigureOut">
               <a:rPr lang="es-MX" smtClean="0"/>
-              <a:t>17/12/2025</a:t>
+              <a:t>06/01/2026</a:t>
             </a:fld>
             <a:endParaRPr lang="es-MX"/>
           </a:p>
@@ -3226,7 +3226,7 @@
           <a:p>
             <a:fld id="{ABDDA2F0-ADA3-4A09-A4A4-0854B4A15306}" type="datetimeFigureOut">
               <a:rPr lang="es-MX" smtClean="0"/>
-              <a:t>17/12/2025</a:t>
+              <a:t>06/01/2026</a:t>
             </a:fld>
             <a:endParaRPr lang="es-MX"/>
           </a:p>
@@ -3636,7 +3636,7 @@
           <p:cNvPr id="12" name="Subtítulo 2">
             <a:extLst>
               <a:ext uri="{FF2B5EF4-FFF2-40B4-BE49-F238E27FC236}">
-                <a16:creationId xmlns:a16="http://schemas.microsoft.com/office/drawing/2014/main" xmlns="" id="{ECC718EC-22DC-2FC1-E7BF-660F4465FB20}"/>
+                <a16:creationId xmlns:a16="http://schemas.microsoft.com/office/drawing/2014/main" id="{ECC718EC-22DC-2FC1-E7BF-660F4465FB20}"/>
               </a:ext>
             </a:extLst>
           </p:cNvPr>
@@ -3853,7 +3853,7 @@
             <p:cNvPr id="1028" name="Picture 4" descr="Uanl vector logo - Uanl logo vector free download">
               <a:extLst>
                 <a:ext uri="{FF2B5EF4-FFF2-40B4-BE49-F238E27FC236}">
-                  <a16:creationId xmlns:a16="http://schemas.microsoft.com/office/drawing/2014/main" xmlns="" id="{A1EF89F4-4576-B62D-20F9-D2FF8A2E246A}"/>
+                  <a16:creationId xmlns:a16="http://schemas.microsoft.com/office/drawing/2014/main" id="{A1EF89F4-4576-B62D-20F9-D2FF8A2E246A}"/>
                 </a:ext>
               </a:extLst>
             </p:cNvPr>
@@ -3914,7 +3914,7 @@
               <p:cNvPr id="14" name="Grupo 13">
                 <a:extLst>
                   <a:ext uri="{FF2B5EF4-FFF2-40B4-BE49-F238E27FC236}">
-                    <a16:creationId xmlns:a16="http://schemas.microsoft.com/office/drawing/2014/main" xmlns="" id="{7618CDC3-6984-FA21-1D90-EF5639665330}"/>
+                    <a16:creationId xmlns:a16="http://schemas.microsoft.com/office/drawing/2014/main" id="{7618CDC3-6984-FA21-1D90-EF5639665330}"/>
                   </a:ext>
                 </a:extLst>
               </p:cNvPr>
@@ -3934,7 +3934,7 @@
                 <p:cNvPr id="1034" name="Picture 10" descr="Universidad Autónoma de Nuevo León">
                   <a:extLst>
                     <a:ext uri="{FF2B5EF4-FFF2-40B4-BE49-F238E27FC236}">
-                      <a16:creationId xmlns:a16="http://schemas.microsoft.com/office/drawing/2014/main" xmlns="" id="{614962FF-F8BC-8C60-D531-371C411ED902}"/>
+                      <a16:creationId xmlns:a16="http://schemas.microsoft.com/office/drawing/2014/main" id="{614962FF-F8BC-8C60-D531-371C411ED902}"/>
                     </a:ext>
                   </a:extLst>
                 </p:cNvPr>
@@ -3981,7 +3981,7 @@
                 <p:cNvPr id="1036" name="Picture 12" descr="Fisico Matematico Logo Símbolos Coloridos De La Matemáticas 3d Stock">
                   <a:extLst>
                     <a:ext uri="{FF2B5EF4-FFF2-40B4-BE49-F238E27FC236}">
-                      <a16:creationId xmlns:a16="http://schemas.microsoft.com/office/drawing/2014/main" xmlns="" id="{9DCF93C1-4712-9517-4CC0-A6074B26C461}"/>
+                      <a16:creationId xmlns:a16="http://schemas.microsoft.com/office/drawing/2014/main" id="{9DCF93C1-4712-9517-4CC0-A6074B26C461}"/>
                     </a:ext>
                   </a:extLst>
                 </p:cNvPr>
@@ -4126,7 +4126,7 @@
           <p:cNvPr id="2" name="Título 1">
             <a:extLst>
               <a:ext uri="{FF2B5EF4-FFF2-40B4-BE49-F238E27FC236}">
-                <a16:creationId xmlns:a16="http://schemas.microsoft.com/office/drawing/2014/main" xmlns="" id="{5EF8233C-F3DA-2ABC-9288-4BCD7433344C}"/>
+                <a16:creationId xmlns:a16="http://schemas.microsoft.com/office/drawing/2014/main" id="{5EF8233C-F3DA-2ABC-9288-4BCD7433344C}"/>
               </a:ext>
             </a:extLst>
           </p:cNvPr>
@@ -4177,7 +4177,7 @@
           <p:cNvPr id="3" name="Subtítulo 2">
             <a:extLst>
               <a:ext uri="{FF2B5EF4-FFF2-40B4-BE49-F238E27FC236}">
-                <a16:creationId xmlns:a16="http://schemas.microsoft.com/office/drawing/2014/main" xmlns="" id="{EC6C3CBE-087A-6EFC-794A-BF6D55DB7543}"/>
+                <a16:creationId xmlns:a16="http://schemas.microsoft.com/office/drawing/2014/main" id="{EC6C3CBE-087A-6EFC-794A-BF6D55DB7543}"/>
               </a:ext>
             </a:extLst>
           </p:cNvPr>
@@ -4271,7 +4271,7 @@
           <p:cNvPr id="2" name="Título 1">
             <a:extLst>
               <a:ext uri="{FF2B5EF4-FFF2-40B4-BE49-F238E27FC236}">
-                <a16:creationId xmlns:a16="http://schemas.microsoft.com/office/drawing/2014/main" xmlns="" id="{7C97405F-E812-8ECA-0FBF-DE395633D086}"/>
+                <a16:creationId xmlns:a16="http://schemas.microsoft.com/office/drawing/2014/main" id="{7C97405F-E812-8ECA-0FBF-DE395633D086}"/>
               </a:ext>
             </a:extLst>
           </p:cNvPr>
@@ -4304,7 +4304,7 @@
           <p:cNvPr id="3" name="Marcador de contenido 2">
             <a:extLst>
               <a:ext uri="{FF2B5EF4-FFF2-40B4-BE49-F238E27FC236}">
-                <a16:creationId xmlns:a16="http://schemas.microsoft.com/office/drawing/2014/main" xmlns="" id="{4895F9A4-5583-A4D7-2C26-2C99E36AFD03}"/>
+                <a16:creationId xmlns:a16="http://schemas.microsoft.com/office/drawing/2014/main" id="{4895F9A4-5583-A4D7-2C26-2C99E36AFD03}"/>
               </a:ext>
             </a:extLst>
           </p:cNvPr>
@@ -4519,7 +4519,7 @@
           <p:cNvPr id="13" name="Picture 12">
             <a:extLst>
               <a:ext uri="{FF2B5EF4-FFF2-40B4-BE49-F238E27FC236}">
-                <a16:creationId xmlns:a16="http://schemas.microsoft.com/office/drawing/2014/main" xmlns="" id="{130D5EE9-6E7E-80B8-FCFF-8881747CDF7D}"/>
+                <a16:creationId xmlns:a16="http://schemas.microsoft.com/office/drawing/2014/main" id="{130D5EE9-6E7E-80B8-FCFF-8881747CDF7D}"/>
               </a:ext>
             </a:extLst>
           </p:cNvPr>
@@ -4576,7 +4576,7 @@
           <p:cNvPr id="2" name="Título 1">
             <a:extLst>
               <a:ext uri="{FF2B5EF4-FFF2-40B4-BE49-F238E27FC236}">
-                <a16:creationId xmlns:a16="http://schemas.microsoft.com/office/drawing/2014/main" xmlns="" id="{670F0C23-FE50-8839-B107-C21CD5459C01}"/>
+                <a16:creationId xmlns:a16="http://schemas.microsoft.com/office/drawing/2014/main" id="{670F0C23-FE50-8839-B107-C21CD5459C01}"/>
               </a:ext>
             </a:extLst>
           </p:cNvPr>
@@ -4614,7 +4614,7 @@
           <p:cNvPr id="3" name="Marcador de contenido 2">
             <a:extLst>
               <a:ext uri="{FF2B5EF4-FFF2-40B4-BE49-F238E27FC236}">
-                <a16:creationId xmlns:a16="http://schemas.microsoft.com/office/drawing/2014/main" xmlns="" id="{3D773A57-4E75-6D1E-BD6A-ACA49DF5A864}"/>
+                <a16:creationId xmlns:a16="http://schemas.microsoft.com/office/drawing/2014/main" id="{3D773A57-4E75-6D1E-BD6A-ACA49DF5A864}"/>
               </a:ext>
             </a:extLst>
           </p:cNvPr>
@@ -4718,7 +4718,7 @@
             <p:cNvPr id="6" name="Picture 4" descr="Uanl vector logo - Uanl logo vector free download">
               <a:extLst>
                 <a:ext uri="{FF2B5EF4-FFF2-40B4-BE49-F238E27FC236}">
-                  <a16:creationId xmlns:a16="http://schemas.microsoft.com/office/drawing/2014/main" xmlns="" id="{A1EF89F4-4576-B62D-20F9-D2FF8A2E246A}"/>
+                  <a16:creationId xmlns:a16="http://schemas.microsoft.com/office/drawing/2014/main" id="{A1EF89F4-4576-B62D-20F9-D2FF8A2E246A}"/>
                 </a:ext>
               </a:extLst>
             </p:cNvPr>
@@ -4779,7 +4779,7 @@
               <p:cNvPr id="8" name="Grupo 13">
                 <a:extLst>
                   <a:ext uri="{FF2B5EF4-FFF2-40B4-BE49-F238E27FC236}">
-                    <a16:creationId xmlns:a16="http://schemas.microsoft.com/office/drawing/2014/main" xmlns="" id="{7618CDC3-6984-FA21-1D90-EF5639665330}"/>
+                    <a16:creationId xmlns:a16="http://schemas.microsoft.com/office/drawing/2014/main" id="{7618CDC3-6984-FA21-1D90-EF5639665330}"/>
                   </a:ext>
                 </a:extLst>
               </p:cNvPr>
@@ -4799,7 +4799,7 @@
                 <p:cNvPr id="10" name="Picture 10" descr="Universidad Autónoma de Nuevo León">
                   <a:extLst>
                     <a:ext uri="{FF2B5EF4-FFF2-40B4-BE49-F238E27FC236}">
-                      <a16:creationId xmlns:a16="http://schemas.microsoft.com/office/drawing/2014/main" xmlns="" id="{614962FF-F8BC-8C60-D531-371C411ED902}"/>
+                      <a16:creationId xmlns:a16="http://schemas.microsoft.com/office/drawing/2014/main" id="{614962FF-F8BC-8C60-D531-371C411ED902}"/>
                     </a:ext>
                   </a:extLst>
                 </p:cNvPr>
@@ -4846,7 +4846,7 @@
                 <p:cNvPr id="11" name="Picture 12" descr="Fisico Matematico Logo Símbolos Coloridos De La Matemáticas 3d Stock">
                   <a:extLst>
                     <a:ext uri="{FF2B5EF4-FFF2-40B4-BE49-F238E27FC236}">
-                      <a16:creationId xmlns:a16="http://schemas.microsoft.com/office/drawing/2014/main" xmlns="" id="{9DCF93C1-4712-9517-4CC0-A6074B26C461}"/>
+                      <a16:creationId xmlns:a16="http://schemas.microsoft.com/office/drawing/2014/main" id="{9DCF93C1-4712-9517-4CC0-A6074B26C461}"/>
                     </a:ext>
                   </a:extLst>
                 </p:cNvPr>
@@ -5026,7 +5026,7 @@
           <p:cNvPr id="2" name="Título 1">
             <a:extLst>
               <a:ext uri="{FF2B5EF4-FFF2-40B4-BE49-F238E27FC236}">
-                <a16:creationId xmlns:a16="http://schemas.microsoft.com/office/drawing/2014/main" xmlns="" id="{BAB3C702-D01F-22C8-A53B-ED6B01BB12EA}"/>
+                <a16:creationId xmlns:a16="http://schemas.microsoft.com/office/drawing/2014/main" id="{BAB3C702-D01F-22C8-A53B-ED6B01BB12EA}"/>
               </a:ext>
             </a:extLst>
           </p:cNvPr>
@@ -5059,7 +5059,7 @@
           <p:cNvPr id="3" name="Marcador de contenido 2">
             <a:extLst>
               <a:ext uri="{FF2B5EF4-FFF2-40B4-BE49-F238E27FC236}">
-                <a16:creationId xmlns:a16="http://schemas.microsoft.com/office/drawing/2014/main" xmlns="" id="{2D8CD9DD-E26B-97A0-50D8-9A66444B9BE2}"/>
+                <a16:creationId xmlns:a16="http://schemas.microsoft.com/office/drawing/2014/main" id="{2D8CD9DD-E26B-97A0-50D8-9A66444B9BE2}"/>
               </a:ext>
             </a:extLst>
           </p:cNvPr>
@@ -5073,7 +5073,7 @@
         <p:spPr>
           <a:xfrm>
             <a:off x="838200" y="1436914"/>
-            <a:ext cx="7038703" cy="4740049"/>
+            <a:ext cx="10143836" cy="4740049"/>
           </a:xfrm>
         </p:spPr>
         <p:txBody>
@@ -5176,6 +5176,15 @@
             <a:pPr marL="0" indent="0">
               <a:buNone/>
             </a:pPr>
+            <a:endParaRPr lang="es-MX" sz="2000" dirty="0">
+              <a:latin typeface="Times New Roman" panose="02020603050405020304" pitchFamily="18" charset="0"/>
+              <a:cs typeface="Times New Roman" panose="02020603050405020304" pitchFamily="18" charset="0"/>
+            </a:endParaRPr>
+          </a:p>
+          <a:p>
+            <a:pPr marL="0" indent="0">
+              <a:buNone/>
+            </a:pPr>
             <a:r>
               <a:rPr lang="es-MX" sz="2000" dirty="0">
                 <a:latin typeface="Times New Roman" panose="02020603050405020304" pitchFamily="18" charset="0"/>
@@ -5195,30 +5204,6 @@
           </a:p>
         </p:txBody>
       </p:sp>
-      <p:pic>
-        <p:nvPicPr>
-          <p:cNvPr id="4" name="Picture 3"/>
-          <p:cNvPicPr>
-            <a:picLocks noChangeAspect="1"/>
-          </p:cNvPicPr>
-          <p:nvPr/>
-        </p:nvPicPr>
-        <p:blipFill>
-          <a:blip r:embed="rId2"/>
-          <a:stretch>
-            <a:fillRect/>
-          </a:stretch>
-        </p:blipFill>
-        <p:spPr>
-          <a:xfrm rot="5400000">
-            <a:off x="6612325" y="1278326"/>
-            <a:ext cx="6844254" cy="4315097"/>
-          </a:xfrm>
-          <a:prstGeom prst="rect">
-            <a:avLst/>
-          </a:prstGeom>
-        </p:spPr>
-      </p:pic>
       <p:pic>
         <p:nvPicPr>
           <p:cNvPr id="1029" name="Picture 5" descr="https://upload.wikimedia.org/wikipedia/commons/thumb/c/ca/Tripoli-rocketry-association.svg/250px-Tripoli-rocketry-association.svg.png"/>
@@ -5228,7 +5213,7 @@
           <p:nvPr/>
         </p:nvPicPr>
         <p:blipFill>
-          <a:blip r:embed="rId3">
+          <a:blip r:embed="rId2">
             <a:extLst>
               <a:ext uri="{28A0092B-C50C-407E-A947-70E740481C1C}">
                 <a14:useLocalDpi xmlns:a14="http://schemas.microsoft.com/office/drawing/2010/main" val="0"/>
@@ -5242,7 +5227,7 @@
         </p:blipFill>
         <p:spPr bwMode="auto">
           <a:xfrm>
-            <a:off x="5584484" y="4666639"/>
+            <a:off x="6631318" y="3956031"/>
             <a:ext cx="1578732" cy="789366"/>
           </a:xfrm>
           <a:prstGeom prst="rect">
@@ -5269,7 +5254,7 @@
           <p:nvPr/>
         </p:nvPicPr>
         <p:blipFill>
-          <a:blip r:embed="rId4" cstate="print">
+          <a:blip r:embed="rId3" cstate="print">
             <a:extLst>
               <a:ext uri="{28A0092B-C50C-407E-A947-70E740481C1C}">
                 <a14:useLocalDpi xmlns:a14="http://schemas.microsoft.com/office/drawing/2010/main" val="0"/>
@@ -5283,7 +5268,7 @@
         </p:blipFill>
         <p:spPr bwMode="auto">
           <a:xfrm>
-            <a:off x="4156027" y="4783349"/>
+            <a:off x="5202861" y="4072741"/>
             <a:ext cx="644440" cy="674341"/>
           </a:xfrm>
           <a:prstGeom prst="rect">
@@ -5310,7 +5295,7 @@
           <p:nvPr/>
         </p:nvPicPr>
         <p:blipFill>
-          <a:blip r:embed="rId5" cstate="print">
+          <a:blip r:embed="rId4" cstate="print">
             <a:extLst>
               <a:ext uri="{28A0092B-C50C-407E-A947-70E740481C1C}">
                 <a14:useLocalDpi xmlns:a14="http://schemas.microsoft.com/office/drawing/2010/main" val="0"/>
@@ -5324,7 +5309,7 @@
         </p:blipFill>
         <p:spPr bwMode="auto">
           <a:xfrm>
-            <a:off x="4800467" y="4623294"/>
+            <a:off x="5847301" y="3861143"/>
             <a:ext cx="764836" cy="764836"/>
           </a:xfrm>
           <a:prstGeom prst="rect">
@@ -5351,7 +5336,7 @@
           <p:nvPr/>
         </p:nvPicPr>
         <p:blipFill>
-          <a:blip r:embed="rId6" cstate="print">
+          <a:blip r:embed="rId5" cstate="print">
             <a:extLst>
               <a:ext uri="{28A0092B-C50C-407E-A947-70E740481C1C}">
                 <a14:useLocalDpi xmlns:a14="http://schemas.microsoft.com/office/drawing/2010/main" val="0"/>
@@ -5365,7 +5350,7 @@
         </p:blipFill>
         <p:spPr bwMode="auto">
           <a:xfrm>
-            <a:off x="3524927" y="5273672"/>
+            <a:off x="4571761" y="4511521"/>
             <a:ext cx="617761" cy="617761"/>
           </a:xfrm>
           <a:prstGeom prst="rect">
@@ -5392,7 +5377,7 @@
           <p:nvPr/>
         </p:nvPicPr>
         <p:blipFill>
-          <a:blip r:embed="rId7" cstate="print">
+          <a:blip r:embed="rId6" cstate="print">
             <a:extLst>
               <a:ext uri="{28A0092B-C50C-407E-A947-70E740481C1C}">
                 <a14:useLocalDpi xmlns:a14="http://schemas.microsoft.com/office/drawing/2010/main" val="0"/>
@@ -5406,7 +5391,7 @@
         </p:blipFill>
         <p:spPr bwMode="auto">
           <a:xfrm>
-            <a:off x="4914521" y="6008429"/>
+            <a:off x="4732199" y="5508981"/>
             <a:ext cx="2057824" cy="579620"/>
           </a:xfrm>
           <a:prstGeom prst="rect">
@@ -5433,7 +5418,7 @@
           <p:nvPr/>
         </p:nvPicPr>
         <p:blipFill>
-          <a:blip r:embed="rId8" cstate="print">
+          <a:blip r:embed="rId7" cstate="print">
             <a:extLst>
               <a:ext uri="{28A0092B-C50C-407E-A947-70E740481C1C}">
                 <a14:useLocalDpi xmlns:a14="http://schemas.microsoft.com/office/drawing/2010/main" val="0"/>
@@ -5447,7 +5432,7 @@
         </p:blipFill>
         <p:spPr bwMode="auto">
           <a:xfrm>
-            <a:off x="5385183" y="5407656"/>
+            <a:off x="5202861" y="4908208"/>
             <a:ext cx="2351780" cy="600773"/>
           </a:xfrm>
           <a:prstGeom prst="rect">
@@ -5474,14 +5459,14 @@
           <p:nvPr/>
         </p:nvPicPr>
         <p:blipFill>
-          <a:blip r:embed="rId9"/>
+          <a:blip r:embed="rId8"/>
           <a:stretch>
             <a:fillRect/>
           </a:stretch>
         </p:blipFill>
         <p:spPr>
           <a:xfrm>
-            <a:off x="7125618" y="5768695"/>
+            <a:off x="6943296" y="5269247"/>
             <a:ext cx="706002" cy="907716"/>
           </a:xfrm>
           <a:prstGeom prst="rect">
@@ -5498,7 +5483,7 @@
           <p:nvPr/>
         </p:nvPicPr>
         <p:blipFill>
-          <a:blip r:embed="rId10" cstate="print">
+          <a:blip r:embed="rId9" cstate="print">
             <a:extLst>
               <a:ext uri="{28A0092B-C50C-407E-A947-70E740481C1C}">
                 <a14:useLocalDpi xmlns:a14="http://schemas.microsoft.com/office/drawing/2010/main" val="0"/>
@@ -5512,7 +5497,7 @@
         </p:blipFill>
         <p:spPr bwMode="auto">
           <a:xfrm>
-            <a:off x="4127429" y="5708042"/>
+            <a:off x="3945107" y="5208594"/>
             <a:ext cx="695196" cy="695196"/>
           </a:xfrm>
           <a:prstGeom prst="rect">
